--- a/assets/pptx/catalog-714.pptx
+++ b/assets/pptx/catalog-714.pptx
@@ -3443,7 +3443,7 @@
                 <a:ea typeface="Ebrima"/>
                 <a:cs typeface="Ebrima"/>
               </a:rPr>
-              <a:t>አዝ አንተን አንተን ይላል ልቤ (4x)</a:t>
+              <a:t>አዝ አንተን አንተን ይላል ልቤ 4x</a:t>
             </a:r>
           </a:p>
           <a:p>
@@ -3533,7 +3533,7 @@
                 <a:ea typeface="Ebrima"/>
                 <a:cs typeface="Ebrima"/>
               </a:rPr>
-              <a:t>አንተን አንተን ይላል ልቤ (4x)</a:t>
+              <a:t>አንተን አንተን ይላል ልቤ 4x</a:t>
             </a:r>
           </a:p>
         </p:txBody>
@@ -3600,7 +3600,7 @@
                 <a:ea typeface="Ebrima"/>
                 <a:cs typeface="Ebrima"/>
               </a:rPr>
-              <a:t>አዝ አንተን አንተን ይላል ልቤ (4x)</a:t>
+              <a:t>አዝ አንተን አንተን ይላል ልቤ 4x</a:t>
             </a:r>
           </a:p>
           <a:p>
@@ -3690,7 +3690,7 @@
                 <a:ea typeface="Ebrima"/>
                 <a:cs typeface="Ebrima"/>
               </a:rPr>
-              <a:t>አንተን አንተን ይላል ልቤ (4x)</a:t>
+              <a:t>አንተን አንተን ይላል ልቤ 4x</a:t>
             </a:r>
           </a:p>
         </p:txBody>
@@ -4071,7 +4071,7 @@
                 <a:ea typeface="Ebrima"/>
                 <a:cs typeface="Ebrima"/>
               </a:rPr>
-              <a:t>አዝ አንተን አንተን ይላል ልቤ (4x)</a:t>
+              <a:t>አዝ አንተን አንተን ይላል ልቤ 4x</a:t>
             </a:r>
           </a:p>
           <a:p>
@@ -4161,7 +4161,7 @@
                 <a:ea typeface="Ebrima"/>
                 <a:cs typeface="Ebrima"/>
               </a:rPr>
-              <a:t>አንተን አንተን ይላል ልቤ (4x)</a:t>
+              <a:t>አንተን አንተን ይላል ልቤ 4x</a:t>
             </a:r>
           </a:p>
         </p:txBody>
